--- a/test/testdata/conversion/onefile_source.pptx
+++ b/test/testdata/conversion/onefile_source.pptx
@@ -251,7 +251,7 @@
             <a:fld id="{294670BC-B8C6-44A7-84E1-23632D8FD86F}" type="datetimeFigureOut">
               <a:rPr lang="ja-JP" altLang="en-US" smtClean="0"/>
               <a:pPr/>
-              <a:t>2024/12/11</a:t>
+              <a:t>2025/2/22</a:t>
             </a:fld>
             <a:endParaRPr lang="ja-JP" altLang="en-US"/>
           </a:p>
@@ -2232,7 +2232,7 @@
                   <a:schemeClr val="tx1"/>
                 </a:solidFill>
               </a:rPr>
-              <a:t>#DT#WX1.PG1) Chapter 1, Page 1   !!S_1!!</a:t>
+              <a:t>#DT#WX1.PG1#) Chapter 1, Page 1   !!S_1!!</a:t>
             </a:r>
             <a:endParaRPr lang="ja-JP" altLang="en-US" sz="2800" dirty="0">
               <a:solidFill>
@@ -2462,7 +2462,7 @@
         <p:spPr bwMode="auto">
           <a:xfrm>
             <a:off x="983432" y="836712"/>
-            <a:ext cx="3024336" cy="0"/>
+            <a:ext cx="3312368" cy="0"/>
           </a:xfrm>
           <a:prstGeom prst="line">
             <a:avLst/>
@@ -2496,7 +2496,7 @@
         </p:nvCxnSpPr>
         <p:spPr bwMode="auto">
           <a:xfrm flipV="1">
-            <a:off x="8751642" y="836712"/>
+            <a:off x="9039679" y="836712"/>
             <a:ext cx="0" cy="614906"/>
           </a:xfrm>
           <a:prstGeom prst="straightConnector1">
@@ -2533,7 +2533,7 @@
         </p:nvCxnSpPr>
         <p:spPr bwMode="auto">
           <a:xfrm>
-            <a:off x="8112224" y="836712"/>
+            <a:off x="8400261" y="836712"/>
             <a:ext cx="1296144" cy="0"/>
           </a:xfrm>
           <a:prstGeom prst="line">
@@ -2568,7 +2568,7 @@
         </p:nvSpPr>
         <p:spPr bwMode="auto">
           <a:xfrm>
-            <a:off x="8112224" y="1412776"/>
+            <a:off x="8400261" y="1412776"/>
             <a:ext cx="3456379" cy="738666"/>
           </a:xfrm>
           <a:prstGeom prst="rect">
@@ -2636,7 +2636,7 @@
         </p:nvSpPr>
         <p:spPr bwMode="auto">
           <a:xfrm>
-            <a:off x="8112224" y="2160969"/>
+            <a:off x="8400261" y="2160969"/>
             <a:ext cx="3456379" cy="1384997"/>
           </a:xfrm>
           <a:prstGeom prst="rect">
@@ -3482,7 +3482,7 @@
           <a:p>
             <a:r>
               <a:rPr lang="en-US" altLang="ja-JP" sz="2400"/>
-              <a:t>#DT#WX1.PG2) DT-code in content area !!S_2!!</a:t>
+              <a:t>#DT#WX1.PG2#) DT-code in content area !!S_2!!</a:t>
             </a:r>
             <a:endParaRPr lang="ja-JP" altLang="en-US" sz="2400"/>
           </a:p>
@@ -3604,7 +3604,7 @@
         <p:spPr bwMode="auto">
           <a:xfrm>
             <a:off x="1127453" y="3548346"/>
-            <a:ext cx="2232243" cy="0"/>
+            <a:ext cx="2376259" cy="0"/>
           </a:xfrm>
           <a:prstGeom prst="line">
             <a:avLst/>
@@ -3687,7 +3687,7 @@
                   <a:schemeClr val="tx1"/>
                 </a:solidFill>
               </a:rPr>
-              <a:t>#DT#WX1.PGA)  DT-code without numeric !!S_3!!</a:t>
+              <a:t>#DT#WX1.PGA#)  DT-code without numeric !!S_3!!</a:t>
             </a:r>
             <a:endParaRPr lang="ja-JP" altLang="en-US" sz="2800" dirty="0">
               <a:solidFill>
@@ -3917,7 +3917,7 @@
         <p:spPr bwMode="auto">
           <a:xfrm>
             <a:off x="983432" y="836712"/>
-            <a:ext cx="3024336" cy="0"/>
+            <a:ext cx="3528392" cy="0"/>
           </a:xfrm>
           <a:prstGeom prst="line">
             <a:avLst/>
@@ -4000,7 +4000,7 @@
                   <a:schemeClr val="tx1"/>
                 </a:solidFill>
               </a:rPr>
-              <a:t>#DT#WXB.PGX)  DT-code without numeric !!S_4!!</a:t>
+              <a:t>#DT#WXB.PGX#)  DT-code without numeric !!S_4!!</a:t>
             </a:r>
             <a:endParaRPr lang="ja-JP" altLang="en-US" sz="2800" dirty="0">
               <a:solidFill>
@@ -4334,7 +4334,7 @@
         <p:spPr bwMode="auto">
           <a:xfrm>
             <a:off x="983432" y="836712"/>
-            <a:ext cx="3312368" cy="0"/>
+            <a:ext cx="3528392" cy="0"/>
           </a:xfrm>
           <a:prstGeom prst="line">
             <a:avLst/>
@@ -4557,7 +4557,7 @@
         <p:spPr bwMode="auto">
           <a:xfrm>
             <a:off x="1127453" y="1933416"/>
-            <a:ext cx="8784971" cy="461665"/>
+            <a:ext cx="9577058" cy="461665"/>
           </a:xfrm>
           <a:prstGeom prst="rect">
             <a:avLst/>
@@ -4594,7 +4594,7 @@
           <a:p>
             <a:r>
               <a:rPr lang="en-US" altLang="ja-JP" sz="2400"/>
-              <a:t>#DT#WXB.PGB)  2nd DT-code in the same slide        !!S_6!!</a:t>
+              <a:t>#DT#WXB.PGB#)  2nd DT-code in the same slide        !!S_6!!</a:t>
             </a:r>
             <a:endParaRPr lang="ja-JP" altLang="en-US" sz="2400"/>
           </a:p>
@@ -4615,7 +4615,7 @@
         <p:spPr bwMode="auto">
           <a:xfrm>
             <a:off x="1127453" y="1482965"/>
-            <a:ext cx="8784971" cy="461665"/>
+            <a:ext cx="9577058" cy="461665"/>
           </a:xfrm>
           <a:prstGeom prst="rect">
             <a:avLst/>
@@ -4652,7 +4652,7 @@
           <a:p>
             <a:r>
               <a:rPr lang="en-US" altLang="ja-JP" sz="2400"/>
-              <a:t>#DT#WXB.PGA)  1st DT-code in a slide                       !!S_5!!</a:t>
+              <a:t>#DT#WXB.PGA#)  1st DT-code in a slide                       !!S_5!!</a:t>
             </a:r>
             <a:endParaRPr lang="ja-JP" altLang="en-US" sz="2400"/>
           </a:p>
@@ -4775,7 +4775,7 @@
         <p:spPr bwMode="auto">
           <a:xfrm>
             <a:off x="1127452" y="1397089"/>
-            <a:ext cx="10297139" cy="461665"/>
+            <a:ext cx="10513164" cy="461665"/>
           </a:xfrm>
           <a:prstGeom prst="rect">
             <a:avLst/>
@@ -4812,7 +4812,7 @@
           <a:p>
             <a:r>
               <a:rPr lang="en-US" altLang="ja-JP" sz="2400"/>
-              <a:t>#DT#WXB.PG4) chapter and section should be alphanumeric    !!S_7!!</a:t>
+              <a:t>#DT#WXB.PG4#) chapter and section should be alphanumeric    !!S_7!!</a:t>
             </a:r>
             <a:endParaRPr lang="ja-JP" altLang="en-US" sz="2400"/>
           </a:p>
@@ -4867,7 +4867,7 @@
         </p:nvCxnSpPr>
         <p:spPr bwMode="auto">
           <a:xfrm>
-            <a:off x="2805945" y="1833464"/>
+            <a:off x="2744160" y="1833464"/>
             <a:ext cx="648072" cy="0"/>
           </a:xfrm>
           <a:prstGeom prst="line">
@@ -5043,7 +5043,7 @@
         <p:spPr bwMode="auto">
           <a:xfrm>
             <a:off x="1127452" y="2512671"/>
-            <a:ext cx="10297139" cy="461665"/>
+            <a:ext cx="10657180" cy="461665"/>
           </a:xfrm>
           <a:prstGeom prst="rect">
             <a:avLst/>
@@ -5080,7 +5080,7 @@
           <a:p>
             <a:r>
               <a:rPr lang="en-US" altLang="ja-JP" sz="2400"/>
-              <a:t>#DT#W.longSECTIONcode) short and long code sample             !!S_8!!</a:t>
+              <a:t>#DT#W.longSECTIONcode#) short and long code sample             !!S_8!!</a:t>
             </a:r>
             <a:endParaRPr lang="ja-JP" altLang="en-US" sz="2400"/>
           </a:p>
@@ -5173,7 +5173,7 @@
         <p:spPr bwMode="auto">
           <a:xfrm>
             <a:off x="1127452" y="3386609"/>
-            <a:ext cx="10297139" cy="461665"/>
+            <a:ext cx="10513164" cy="461665"/>
           </a:xfrm>
           <a:prstGeom prst="rect">
             <a:avLst/>
@@ -5232,8 +5232,8 @@
         </p:nvCxnSpPr>
         <p:spPr bwMode="auto">
           <a:xfrm flipH="1" flipV="1">
-            <a:off x="2722781" y="3745227"/>
-            <a:ext cx="240871" cy="920868"/>
+            <a:off x="2614902" y="3745227"/>
+            <a:ext cx="324036" cy="920868"/>
           </a:xfrm>
           <a:prstGeom prst="straightConnector1">
             <a:avLst/>
@@ -5373,7 +5373,7 @@
         <p:spPr bwMode="auto">
           <a:xfrm>
             <a:off x="3416980" y="4048458"/>
-            <a:ext cx="6711467" cy="584777"/>
+            <a:ext cx="6711467" cy="338556"/>
           </a:xfrm>
           <a:prstGeom prst="rect">
             <a:avLst/>
@@ -5417,7 +5417,7 @@
                 <a:latin typeface="BIZ UDPゴシック" panose="020B0400000000000000" pitchFamily="50" charset="-128"/>
                 <a:ea typeface="BIZ UDPゴシック" panose="020B0400000000000000" pitchFamily="50" charset="-128"/>
               </a:rPr>
-              <a:t>terminator can be several non-alphanumerical characters, such as ')', ':', '&gt;', '|', but can't be '_' and '.'</a:t>
+              <a:t>terminator should be '#'</a:t>
             </a:r>
             <a:endParaRPr kumimoji="1" lang="ja-JP" altLang="en-US" sz="1600" kern="0">
               <a:latin typeface="BIZ UDPゴシック" panose="020B0400000000000000" pitchFamily="50" charset="-128"/>
@@ -5441,7 +5441,7 @@
         <p:spPr bwMode="auto">
           <a:xfrm>
             <a:off x="1127452" y="5328364"/>
-            <a:ext cx="10297139" cy="461665"/>
+            <a:ext cx="10513164" cy="461665"/>
           </a:xfrm>
           <a:prstGeom prst="rect">
             <a:avLst/>
@@ -5478,7 +5478,7 @@
           <a:p>
             <a:r>
               <a:rPr lang="en-US" altLang="ja-JP" sz="2400"/>
-              <a:t>#DT#WXD) just a chapter code without section also available  !!S_10!!</a:t>
+              <a:t>#DT#WXD#) just a chapter code without section also available  !!S_10!!</a:t>
             </a:r>
             <a:endParaRPr lang="ja-JP" altLang="en-US" sz="2400"/>
           </a:p>
@@ -5520,6 +5520,36 @@
           <a:chExt cx="0" cy="0"/>
         </a:xfrm>
       </p:grpSpPr>
+      <p:pic>
+        <p:nvPicPr>
+          <p:cNvPr id="8" name="図 7">
+            <a:extLst>
+              <a:ext uri="{FF2B5EF4-FFF2-40B4-BE49-F238E27FC236}">
+                <a16:creationId xmlns:a16="http://schemas.microsoft.com/office/drawing/2014/main" id="{6E3513D5-0FEA-44CE-1031-07E436469574}"/>
+              </a:ext>
+            </a:extLst>
+          </p:cNvPr>
+          <p:cNvPicPr>
+            <a:picLocks noChangeAspect="1"/>
+          </p:cNvPicPr>
+          <p:nvPr/>
+        </p:nvPicPr>
+        <p:blipFill>
+          <a:blip r:embed="rId2"/>
+          <a:stretch>
+            <a:fillRect/>
+          </a:stretch>
+        </p:blipFill>
+        <p:spPr>
+          <a:xfrm>
+            <a:off x="1071852" y="3946432"/>
+            <a:ext cx="1911393" cy="2434896"/>
+          </a:xfrm>
+          <a:prstGeom prst="rect">
+            <a:avLst/>
+          </a:prstGeom>
+        </p:spPr>
+      </p:pic>
       <p:sp>
         <p:nvSpPr>
           <p:cNvPr id="2" name="タイトル 1">
@@ -5695,7 +5725,7 @@
           <a:p>
             <a:r>
               <a:rPr lang="en-US" altLang="ja-JP" sz="2400"/>
-              <a:t>#DT#WXY.PG1)  101 of digital marketing</a:t>
+              <a:t>#DT#WXY.PG1#)  101 of digital marketing</a:t>
             </a:r>
           </a:p>
         </p:txBody>
@@ -5870,7 +5900,7 @@
         <p:spPr bwMode="auto">
           <a:xfrm>
             <a:off x="2639616" y="2273194"/>
-            <a:ext cx="1368152" cy="0"/>
+            <a:ext cx="1512168" cy="0"/>
           </a:xfrm>
           <a:prstGeom prst="line">
             <a:avLst/>
@@ -5906,7 +5936,7 @@
         </p:nvCxnSpPr>
         <p:spPr bwMode="auto">
           <a:xfrm>
-            <a:off x="5735960" y="1960606"/>
+            <a:off x="6023992" y="1960606"/>
             <a:ext cx="0" cy="299809"/>
           </a:xfrm>
           <a:prstGeom prst="straightConnector1">
@@ -5943,7 +5973,7 @@
         </p:nvCxnSpPr>
         <p:spPr bwMode="auto">
           <a:xfrm>
-            <a:off x="4295800" y="2273194"/>
+            <a:off x="4583832" y="2273194"/>
             <a:ext cx="3456384" cy="0"/>
           </a:xfrm>
           <a:prstGeom prst="line">
@@ -5978,7 +6008,7 @@
         </p:nvSpPr>
         <p:spPr bwMode="auto">
           <a:xfrm>
-            <a:off x="5015880" y="1542633"/>
+            <a:off x="5303912" y="1542633"/>
             <a:ext cx="1721386" cy="461665"/>
           </a:xfrm>
           <a:prstGeom prst="rect">
@@ -6191,7 +6221,7 @@
         </p:nvSpPr>
         <p:spPr bwMode="auto">
           <a:xfrm>
-            <a:off x="4367808" y="3946432"/>
+            <a:off x="4655840" y="3946432"/>
             <a:ext cx="6624736" cy="369332"/>
           </a:xfrm>
           <a:prstGeom prst="rect">
@@ -6229,7 +6259,7 @@
           <a:p>
             <a:r>
               <a:rPr lang="en-US" altLang="ja-JP" sz="1800"/>
-              <a:t>#RI#WXY.PG1                                        !!S_11!!</a:t>
+              <a:t>#RI#WXY.PG1#                                        !!S_11!!</a:t>
             </a:r>
           </a:p>
         </p:txBody>
@@ -6248,7 +6278,7 @@
         </p:nvSpPr>
         <p:spPr bwMode="auto">
           <a:xfrm>
-            <a:off x="4367808" y="4672678"/>
+            <a:off x="4655840" y="4672678"/>
             <a:ext cx="6624736" cy="369332"/>
           </a:xfrm>
           <a:prstGeom prst="rect">
@@ -6286,7 +6316,7 @@
           <a:p>
             <a:r>
               <a:rPr lang="en-US" altLang="ja-JP" sz="1800"/>
-              <a:t>#RT#WXY.PG1                                       !!S_12!!</a:t>
+              <a:t>#RT#WXY.PG1#                                       !!S_12!!</a:t>
             </a:r>
           </a:p>
         </p:txBody>
@@ -6305,7 +6335,7 @@
         </p:nvSpPr>
         <p:spPr bwMode="auto">
           <a:xfrm>
-            <a:off x="4367808" y="6107626"/>
+            <a:off x="4655840" y="6107626"/>
             <a:ext cx="6624736" cy="369332"/>
           </a:xfrm>
           <a:prstGeom prst="rect">
@@ -6343,7 +6373,7 @@
           <a:p>
             <a:r>
               <a:rPr lang="en-US" altLang="ja-JP" sz="1800"/>
-              <a:t>#RN#WXY.PG1                                        !!S_14!!</a:t>
+              <a:t>#RN#WXY.PG1#                                        !!S_14!!</a:t>
             </a:r>
           </a:p>
         </p:txBody>
@@ -6362,7 +6392,7 @@
         </p:nvSpPr>
         <p:spPr bwMode="auto">
           <a:xfrm>
-            <a:off x="4367808" y="5430516"/>
+            <a:off x="4655840" y="5430516"/>
             <a:ext cx="6624736" cy="369332"/>
           </a:xfrm>
           <a:prstGeom prst="rect">
@@ -6400,7 +6430,7 @@
           <a:p>
             <a:r>
               <a:rPr lang="en-US" altLang="ja-JP" sz="1800"/>
-              <a:t>#RIT#WXY.PG1                                        !!S_13!!</a:t>
+              <a:t>#RIT#WXY.PG1#                                        !!S_13!!</a:t>
             </a:r>
           </a:p>
         </p:txBody>
@@ -6677,42 +6707,6 @@
           </a:p>
         </p:txBody>
       </p:sp>
-      <p:pic>
-        <p:nvPicPr>
-          <p:cNvPr id="4" name="グラフィックス 3">
-            <a:extLst>
-              <a:ext uri="{FF2B5EF4-FFF2-40B4-BE49-F238E27FC236}">
-                <a16:creationId xmlns:a16="http://schemas.microsoft.com/office/drawing/2014/main" id="{B1F701F6-62F3-76BB-2566-E069F583E5A9}"/>
-              </a:ext>
-            </a:extLst>
-          </p:cNvPr>
-          <p:cNvPicPr>
-            <a:picLocks noChangeAspect="1"/>
-          </p:cNvPicPr>
-          <p:nvPr/>
-        </p:nvPicPr>
-        <p:blipFill>
-          <a:blip r:embed="rId2">
-            <a:extLst>
-              <a:ext uri="{96DAC541-7B7A-43D3-8B79-37D633B846F1}">
-                <asvg:svgBlip xmlns:asvg="http://schemas.microsoft.com/office/drawing/2016/SVG/main" r:embed="rId3"/>
-              </a:ext>
-            </a:extLst>
-          </a:blip>
-          <a:stretch>
-            <a:fillRect/>
-          </a:stretch>
-        </p:blipFill>
-        <p:spPr>
-          <a:xfrm>
-            <a:off x="983432" y="3925995"/>
-            <a:ext cx="2571750" cy="2647950"/>
-          </a:xfrm>
-          <a:prstGeom prst="rect">
-            <a:avLst/>
-          </a:prstGeom>
-        </p:spPr>
-      </p:pic>
     </p:spTree>
     <p:extLst>
       <p:ext uri="{BB962C8B-B14F-4D97-AF65-F5344CB8AC3E}">
@@ -6942,7 +6936,7 @@
                 <a:latin typeface="BIZ UDPゴシック" panose="020B0400000000000000" pitchFamily="50" charset="-128"/>
                 <a:ea typeface="BIZ UDPゴシック" panose="020B0400000000000000" pitchFamily="50" charset="-128"/>
               </a:rPr>
-              <a:t>#RLISTIT#WX1</a:t>
+              <a:t>#RLISTIT#WX1#</a:t>
             </a:r>
           </a:p>
         </p:txBody>
@@ -7016,7 +7010,7 @@
             <a:pPr algn="r"/>
             <a:r>
               <a:rPr lang="en-US" altLang="ja-JP" sz="1600"/>
-              <a:t>#RLISTSN#WX1</a:t>
+              <a:t>#RLISTSN#WX1#</a:t>
             </a:r>
           </a:p>
         </p:txBody>
@@ -7084,7 +7078,7 @@
                 <a:latin typeface="BIZ UDPゴシック" panose="020B0400000000000000" pitchFamily="50" charset="-128"/>
                 <a:ea typeface="BIZ UDPゴシック" panose="020B0400000000000000" pitchFamily="50" charset="-128"/>
               </a:rPr>
-              <a:t>#RLISTIT#WX2</a:t>
+              <a:t>#RLISTIT#WX2#</a:t>
             </a:r>
             <a:endParaRPr kumimoji="1" lang="en-US" altLang="ja-JP" sz="1600" kern="0">
               <a:latin typeface="BIZ UDPゴシック" panose="020B0400000000000000" pitchFamily="50" charset="-128"/>
@@ -7162,7 +7156,7 @@
             <a:pPr algn="r"/>
             <a:r>
               <a:rPr lang="en-US" altLang="ja-JP" sz="1600"/>
-              <a:t>#RLISTSN#WX2</a:t>
+              <a:t>#RLISTSN#WX2#</a:t>
             </a:r>
           </a:p>
         </p:txBody>
